--- a/pwp/Lezione_6.pptx
+++ b/pwp/Lezione_6.pptx
@@ -341,6 +341,538 @@
 </p:presentation>
 </file>
 
+<file path=ppt/ink/ink1.xml><?xml version="1.0" encoding="utf-8"?>
+<inkml:ink xmlns:inkml="http://www.w3.org/2003/InkML">
+  <inkml:definitions>
+    <inkml:context xml:id="ctx0">
+      <inkml:inkSource xml:id="inkSrc0">
+        <inkml:traceFormat>
+          <inkml:channel name="X" type="integer" min="-2.14748E9" max="2.14748E9" units="cm"/>
+          <inkml:channel name="Y" type="integer" min="-2.14748E9" max="2.14748E9" units="cm"/>
+        </inkml:traceFormat>
+        <inkml:channelProperties>
+          <inkml:channelProperty channel="X" name="resolution" value="1000" units="1/cm"/>
+          <inkml:channelProperty channel="Y" name="resolution" value="1000" units="1/cm"/>
+        </inkml:channelProperties>
+      </inkml:inkSource>
+      <inkml:timestamp xml:id="ts0" timeString="2025-06-23T12:33:09.087"/>
+    </inkml:context>
+    <inkml:brush xml:id="br0">
+      <inkml:brushProperty name="width" value="0.08819" units="cm"/>
+      <inkml:brushProperty name="height" value="0.35278" units="cm"/>
+      <inkml:brushProperty name="color" value="#FFFF00"/>
+      <inkml:brushProperty name="tip" value="rectangle"/>
+      <inkml:brushProperty name="rasterOp" value="maskPen"/>
+    </inkml:brush>
+  </inkml:definitions>
+  <inkml:trace contextRef="#ctx0" brushRef="#br0">6319 8605,'42'0,"1"0,22 0,4 0,0 10,-4-7,0 8,-13-11,30 0,-30 0,13 0,21 0,10 15,0-12,-22 12,-30-15,8 0,17 0,26 0,-24 0,20 0,-52 0,22 0,-26 0,13 0,38 0,-29 0,16 0,-28 0,-11 0,53 0,-12 0,33 0,-52 0,6 0,-27 0,30 0,-26 0,9 0,-29 0,30 0,-23 0,53 0,-1 0,35 0,-18 0,3 0,51 0,-28 0,-3 0,8 0,-7 0,-4 0,-26 0,72 13,-109-10,13 10,-1-13,6 0,-1 0,-17 0,1 0,-17 0,-1 0,-14 0</inkml:trace>
+</inkml:ink>
+</file>
+
+<file path=ppt/ink/ink10.xml><?xml version="1.0" encoding="utf-8"?>
+<inkml:ink xmlns:inkml="http://www.w3.org/2003/InkML">
+  <inkml:definitions>
+    <inkml:context xml:id="ctx0">
+      <inkml:inkSource xml:id="inkSrc0">
+        <inkml:traceFormat>
+          <inkml:channel name="X" type="integer" min="-2.14748E9" max="2.14748E9" units="cm"/>
+          <inkml:channel name="Y" type="integer" min="-2.14748E9" max="2.14748E9" units="cm"/>
+        </inkml:traceFormat>
+        <inkml:channelProperties>
+          <inkml:channelProperty channel="X" name="resolution" value="1000" units="1/cm"/>
+          <inkml:channelProperty channel="Y" name="resolution" value="1000" units="1/cm"/>
+        </inkml:channelProperties>
+      </inkml:inkSource>
+      <inkml:timestamp xml:id="ts0" timeString="2025-06-23T12:58:10.756"/>
+    </inkml:context>
+    <inkml:brush xml:id="br0">
+      <inkml:brushProperty name="width" value="0.08819" units="cm"/>
+      <inkml:brushProperty name="height" value="0.35278" units="cm"/>
+      <inkml:brushProperty name="color" value="#FFFF00"/>
+      <inkml:brushProperty name="tip" value="rectangle"/>
+      <inkml:brushProperty name="rasterOp" value="maskPen"/>
+    </inkml:brush>
+  </inkml:definitions>
+  <inkml:trace contextRef="#ctx0" brushRef="#br0">9754 24172,'94'0,"12"0,11 0,-21 0,7 0,16 0,14 0,-2 0,-11 0,-2 0,-3 0,32-1,-4 2,5 9,-11 0,12-5,-51 12,-3 0,18-13,-22 11,13-15,-47 0,17 0,-29 0,7 0,-13 0,1 0,-31 0</inkml:trace>
+</inkml:ink>
+</file>
+
+<file path=ppt/ink/ink11.xml><?xml version="1.0" encoding="utf-8"?>
+<inkml:ink xmlns:inkml="http://www.w3.org/2003/InkML">
+  <inkml:definitions>
+    <inkml:context xml:id="ctx0">
+      <inkml:inkSource xml:id="inkSrc0">
+        <inkml:traceFormat>
+          <inkml:channel name="X" type="integer" min="-2.14748E9" max="2.14748E9" units="cm"/>
+          <inkml:channel name="Y" type="integer" min="-2.14748E9" max="2.14748E9" units="cm"/>
+        </inkml:traceFormat>
+        <inkml:channelProperties>
+          <inkml:channelProperty channel="X" name="resolution" value="1000" units="1/cm"/>
+          <inkml:channelProperty channel="Y" name="resolution" value="1000" units="1/cm"/>
+        </inkml:channelProperties>
+      </inkml:inkSource>
+      <inkml:timestamp xml:id="ts0" timeString="2025-06-23T12:58:14.822"/>
+    </inkml:context>
+    <inkml:brush xml:id="br0">
+      <inkml:brushProperty name="width" value="0.08819" units="cm"/>
+      <inkml:brushProperty name="height" value="0.35278" units="cm"/>
+      <inkml:brushProperty name="color" value="#FFFF00"/>
+      <inkml:brushProperty name="tip" value="rectangle"/>
+      <inkml:brushProperty name="rasterOp" value="maskPen"/>
+    </inkml:brush>
+  </inkml:definitions>
+  <inkml:trace contextRef="#ctx0" brushRef="#br0">13451 24298,'90'0,"61"0,-17 16,7 2,-30-14,-1 1,20 13,-7-2,12-16,1 0,25 0,-19 0,-19 0,-20 0,14 0,-12 0,3 0,38 0,-22 0,-4 0,-17 0,-10 9,1 0,27-5,18 16,10 1,-47-18,-1 0,41 17,-2-1,-38-16,-12-2,24 14,-23-4,-26-9,-18 9,18-11,26 0,-16 0,29 0,37-18,18-5,-33 6,6 2,6-1,12-1,-13 3,-9 2,-14 2,-25 3,-8 1,28 3,-1-25,-34 24,0-11,-29 5,-11 7,53-7,35-8,-39 8,3-1,-1 1,-2-2,39-16,4 26,-69-9,17 3,-42 6,-14-7,31 9,-22 0,73-15,10 11,32-26,19 12,-25-1,-21-11,-3 1,-5 18,-5-18,-11 2,-52 24,43-23,-13 23,39-25,-16 12,-1-3,-39 7,-7 1,-23 8,9-7,97-10,-39 7,12 0,7 4,12 2,-1-2,-1-6,-1-1,1 3,9 6,1 4,-14-3,-11-6,-10 0,64 1,-137 11,8 0,99 0,-51 0,58 0,11 0,18 0,-32 0,-1 0,16 0,-29 0,-52 0,-17 0,-13 0,-12 8,-15 3,-8 8,0-1,0 1,0 30,13 7,-10 31,10-31,-13-7,0-38,0-3</inkml:trace>
+</inkml:ink>
+</file>
+
+<file path=ppt/ink/ink12.xml><?xml version="1.0" encoding="utf-8"?>
+<inkml:ink xmlns:inkml="http://www.w3.org/2003/InkML">
+  <inkml:definitions>
+    <inkml:context xml:id="ctx0">
+      <inkml:inkSource xml:id="inkSrc0">
+        <inkml:traceFormat>
+          <inkml:channel name="X" type="integer" min="-2.14748E9" max="2.14748E9" units="cm"/>
+          <inkml:channel name="Y" type="integer" min="-2.14748E9" max="2.14748E9" units="cm"/>
+        </inkml:traceFormat>
+        <inkml:channelProperties>
+          <inkml:channelProperty channel="X" name="resolution" value="1000" units="1/cm"/>
+          <inkml:channelProperty channel="Y" name="resolution" value="1000" units="1/cm"/>
+        </inkml:channelProperties>
+      </inkml:inkSource>
+      <inkml:timestamp xml:id="ts0" timeString="2025-06-23T12:58:16.639"/>
+    </inkml:context>
+    <inkml:brush xml:id="br0">
+      <inkml:brushProperty name="width" value="0.08819" units="cm"/>
+      <inkml:brushProperty name="height" value="0.35278" units="cm"/>
+      <inkml:brushProperty name="color" value="#FFFF00"/>
+      <inkml:brushProperty name="tip" value="rectangle"/>
+      <inkml:brushProperty name="rasterOp" value="maskPen"/>
+    </inkml:brush>
+  </inkml:definitions>
+  <inkml:trace contextRef="#ctx0" brushRef="#br0">27742 24114,'107'17,"40"-3,30 5,-62-1,7 5,5 1,7-3,1-4,8-3,4-1,-1 2,-7 1,8 6,-5 2,0 0,4-3,20-2,8-3,-5-2,-15 2,-22 1,-13 0,6 0,35 2,5 1,-13-3,-9-4,-10 1,-2 7,-1-3,1-15,-2-2,-10 8,4-1,-16-6,6-3,1 0,1 1,0 0,3 0,12 0,3 0,-4 0,38 0,-7 0,-1 0,-18 0,-11 0,-39 0,-70 0</inkml:trace>
+</inkml:ink>
+</file>
+
+<file path=ppt/ink/ink13.xml><?xml version="1.0" encoding="utf-8"?>
+<inkml:ink xmlns:inkml="http://www.w3.org/2003/InkML">
+  <inkml:definitions>
+    <inkml:context xml:id="ctx0">
+      <inkml:inkSource xml:id="inkSrc0">
+        <inkml:traceFormat>
+          <inkml:channel name="X" type="integer" min="-2.14748E9" max="2.14748E9" units="cm"/>
+          <inkml:channel name="Y" type="integer" min="-2.14748E9" max="2.14748E9" units="cm"/>
+        </inkml:traceFormat>
+        <inkml:channelProperties>
+          <inkml:channelProperty channel="X" name="resolution" value="1000" units="1/cm"/>
+          <inkml:channelProperty channel="Y" name="resolution" value="1000" units="1/cm"/>
+        </inkml:channelProperties>
+      </inkml:inkSource>
+      <inkml:timestamp xml:id="ts0" timeString="2025-06-23T12:58:49.274"/>
+    </inkml:context>
+    <inkml:brush xml:id="br0">
+      <inkml:brushProperty name="width" value="0.08819" units="cm"/>
+      <inkml:brushProperty name="height" value="0.35278" units="cm"/>
+      <inkml:brushProperty name="color" value="#FFFF00"/>
+      <inkml:brushProperty name="tip" value="rectangle"/>
+      <inkml:brushProperty name="rasterOp" value="maskPen"/>
+    </inkml:brush>
+  </inkml:definitions>
+  <inkml:trace contextRef="#ctx0" brushRef="#br0">9502 27067,'81'0,"68"0,-14 0,12 0,12 0,0 0,-13-2,-2 4,3 7,-9 1,-50-7,0-1,57 7,1 2,-53-3,-2-1,40-6,-8 1,-3 13,-15-15,-56 0,-31 0,1 0,0 0,30 0,29-15,-16 12,8-12,-21 15,29 0,14-13,16 10,-51-10,-8 13,-31 0,31 0,-22 0,21 0,-37 0,-3 0</inkml:trace>
+</inkml:ink>
+</file>
+
+<file path=ppt/ink/ink14.xml><?xml version="1.0" encoding="utf-8"?>
+<inkml:ink xmlns:inkml="http://www.w3.org/2003/InkML">
+  <inkml:definitions>
+    <inkml:context xml:id="ctx0">
+      <inkml:inkSource xml:id="inkSrc0">
+        <inkml:traceFormat>
+          <inkml:channel name="X" type="integer" min="-2.14748E9" max="2.14748E9" units="cm"/>
+          <inkml:channel name="Y" type="integer" min="-2.14748E9" max="2.14748E9" units="cm"/>
+        </inkml:traceFormat>
+        <inkml:channelProperties>
+          <inkml:channelProperty channel="X" name="resolution" value="1000" units="1/cm"/>
+          <inkml:channelProperty channel="Y" name="resolution" value="1000" units="1/cm"/>
+        </inkml:channelProperties>
+      </inkml:inkSource>
+      <inkml:timestamp xml:id="ts0" timeString="2025-06-23T12:58:50.993"/>
+    </inkml:context>
+    <inkml:brush xml:id="br0">
+      <inkml:brushProperty name="width" value="0.08819" units="cm"/>
+      <inkml:brushProperty name="height" value="0.35278" units="cm"/>
+      <inkml:brushProperty name="color" value="#FFFF00"/>
+      <inkml:brushProperty name="tip" value="rectangle"/>
+      <inkml:brushProperty name="rasterOp" value="maskPen"/>
+    </inkml:brush>
+  </inkml:definitions>
+  <inkml:trace contextRef="#ctx0" brushRef="#br0">15566 27185,'69'-11,"21"0,16-2,10-8,20 2,-16 10,20 3,12 1,7 1,-1 0,-11-1,5 0,3 1,2 0,0 0,0 2,1 1,1 1,0 1,1 0,3-1,2-1,-5-3,5 0,4-2,0 0,-5 0,-6 0,-10 2,0 2,-10 1,-5 0,-1 0,4-3,11-2,5-2,-1 0,-8 0,-11 3,11 3,-13 3,-9 0,12-1,-21 0,-21 0,-26 0,-30 0,9 0,30 0,49 0,-30 0,12 0,46 0,6 0,-16 0,1 0,-30 0,4 0,-6 0,26 0,-8 0,-21 0,-7 0,53 0,-88 8,-35-6,-7 7,-1-9,119-20,-65 15,68-3,31-3,-53 1,4 0,-2 1,-8 6,-1 2,4-2,26-6,5-3,-20 5,-38 6,-9 2,18-1,-9 0,-9 0,1 0,-62 0,22 0,8 0,65 0,4 0,10 0,-23 0,5 0,9 0,9 0,-17 0,31 0,-46 1,-19-2,-53-8,2 7,-27-6,7 8</inkml:trace>
+</inkml:ink>
+</file>
+
+<file path=ppt/ink/ink15.xml><?xml version="1.0" encoding="utf-8"?>
+<inkml:ink xmlns:inkml="http://www.w3.org/2003/InkML">
+  <inkml:definitions>
+    <inkml:context xml:id="ctx0">
+      <inkml:inkSource xml:id="inkSrc0">
+        <inkml:traceFormat>
+          <inkml:channel name="X" type="integer" min="-2.14748E9" max="2.14748E9" units="cm"/>
+          <inkml:channel name="Y" type="integer" min="-2.14748E9" max="2.14748E9" units="cm"/>
+        </inkml:traceFormat>
+        <inkml:channelProperties>
+          <inkml:channelProperty channel="X" name="resolution" value="1000" units="1/cm"/>
+          <inkml:channelProperty channel="Y" name="resolution" value="1000" units="1/cm"/>
+        </inkml:channelProperties>
+      </inkml:inkSource>
+      <inkml:timestamp xml:id="ts0" timeString="2025-06-23T12:58:55.536"/>
+    </inkml:context>
+    <inkml:brush xml:id="br0">
+      <inkml:brushProperty name="width" value="0.08819" units="cm"/>
+      <inkml:brushProperty name="height" value="0.35278" units="cm"/>
+      <inkml:brushProperty name="color" value="#FFFF00"/>
+      <inkml:brushProperty name="tip" value="rectangle"/>
+      <inkml:brushProperty name="rasterOp" value="maskPen"/>
+    </inkml:brush>
+  </inkml:definitions>
+  <inkml:trace contextRef="#ctx0" brushRef="#br0">9815 29589,'103'-12,"-1"-1,-4-1,-5 1,43-6,-1 4,-21 2,-26 3,10-3,28-6,8-3,17-2,16 0,-36 8,12 0,6 1,-2 2,-4 4,1 3,0 0,2-2,8-6,4-1,-3-1,-6 6,16 6,-7 4,-7-2,-21-6,-6-2,-11 4,-5 5,-6 2,18-1,-5 0,24 0,-52 0,-23-11,-21 8,70-7,46 10,-64-7,13-3,20 1,18-1,4-4,-29-5,2-3,3-2,1 3,12 2,2 3,2 1,-3-3,-3-4,-1-2,-1 1,-3 2,29 0,-3 2,-10 3,22 1,-11 2,-7-2,-17 4,-12 11,-102 0</inkml:trace>
+</inkml:ink>
+</file>
+
+<file path=ppt/ink/ink16.xml><?xml version="1.0" encoding="utf-8"?>
+<inkml:ink xmlns:inkml="http://www.w3.org/2003/InkML">
+  <inkml:definitions>
+    <inkml:context xml:id="ctx0">
+      <inkml:inkSource xml:id="inkSrc0">
+        <inkml:traceFormat>
+          <inkml:channel name="X" type="integer" min="-2.14748E9" max="2.14748E9" units="cm"/>
+          <inkml:channel name="Y" type="integer" min="-2.14748E9" max="2.14748E9" units="cm"/>
+        </inkml:traceFormat>
+        <inkml:channelProperties>
+          <inkml:channelProperty channel="X" name="resolution" value="1000" units="1/cm"/>
+          <inkml:channelProperty channel="Y" name="resolution" value="1000" units="1/cm"/>
+        </inkml:channelProperties>
+      </inkml:inkSource>
+      <inkml:timestamp xml:id="ts0" timeString="2025-06-23T12:58:57.232"/>
+    </inkml:context>
+    <inkml:brush xml:id="br0">
+      <inkml:brushProperty name="width" value="0.08819" units="cm"/>
+      <inkml:brushProperty name="height" value="0.35278" units="cm"/>
+      <inkml:brushProperty name="color" value="#FFFF00"/>
+      <inkml:brushProperty name="tip" value="rectangle"/>
+      <inkml:brushProperty name="rasterOp" value="maskPen"/>
+    </inkml:brush>
+  </inkml:definitions>
+  <inkml:trace contextRef="#ctx0" brushRef="#br0">20837 29427,'35'0,"74"0,11 0,27 0,-14-1,19 0,9 1,-1 2,-25 2,2 3,1 0,2 0,2-2,14-2,5-2,1-1,-6 1,-9 2,-10 4,-9 2,-3 0,1-3,4-3,3-3,-6-1,-14-1,9-5,-8-1,30 8,2-4,-12-14,-6-3,-29 8,6 1,27-5,16-3,-14 4,-19 3,-5 0,38-8,-2 1,-45 8,-3 0,17-8,3-2,-7 1,10 1,30 1,18 1,-10 0,4-6,-3 1,-18 10,5 1,-20 1,-30-2,-23 4,-25 9,-31 0,1 0,0 0,0 0,0 0,-1 0,1 0,0 0,13 0,-10 0,22 0,-9 0,12 0,-12 0,-12 0,-14 0</inkml:trace>
+</inkml:ink>
+</file>
+
+<file path=ppt/ink/ink17.xml><?xml version="1.0" encoding="utf-8"?>
+<inkml:ink xmlns:inkml="http://www.w3.org/2003/InkML">
+  <inkml:definitions>
+    <inkml:context xml:id="ctx0">
+      <inkml:inkSource xml:id="inkSrc0">
+        <inkml:traceFormat>
+          <inkml:channel name="X" type="integer" min="-2.14748E9" max="2.14748E9" units="cm"/>
+          <inkml:channel name="Y" type="integer" min="-2.14748E9" max="2.14748E9" units="cm"/>
+        </inkml:traceFormat>
+        <inkml:channelProperties>
+          <inkml:channelProperty channel="X" name="resolution" value="1000" units="1/cm"/>
+          <inkml:channelProperty channel="Y" name="resolution" value="1000" units="1/cm"/>
+        </inkml:channelProperties>
+      </inkml:inkSource>
+      <inkml:timestamp xml:id="ts0" timeString="2025-06-23T12:59:05.195"/>
+    </inkml:context>
+    <inkml:brush xml:id="br0">
+      <inkml:brushProperty name="width" value="0.08819" units="cm"/>
+      <inkml:brushProperty name="height" value="0.35278" units="cm"/>
+      <inkml:brushProperty name="color" value="#FFFF00"/>
+      <inkml:brushProperty name="tip" value="rectangle"/>
+      <inkml:brushProperty name="rasterOp" value="maskPen"/>
+    </inkml:brush>
+  </inkml:definitions>
+  <inkml:trace contextRef="#ctx0" brushRef="#br0">17374 31798,'100'0,"0"0,37 8,30 7,9 0,-16-1,-10-2,-8-2,12 3,-10 1,18 4,2-1,-9 0,-25-3,14 1,-11-3,0-4,10-1,-8 0,15 5,-2-2,-31-7,4-3,2 2,14 5,4 2,-8-3,18-5,-4-2,-33 1,2 0,-11 0,-9 0,-16 0,-10 0,-51 0,52 0,43 1,32-2,-30-5,14-4,6 0,-1 3,5 4,2 3,2-1,3-3,14-8,4-5,0 0,-7 6,-21 7,-3 4,-5 0,-7-2,-4-6,-8-2,-1 3,59 6,-17 2,-11-1,-49 0,-39 0,-8 0,8 0,-13 0,62-15,39-8,-4 1,10 0,-24 8,8 3,14 1,14 1,-10 4,-1 5,4 0,-19-6,16-2,0-1,-15 3,22 3,0-1,-24-3,15-1,-2 0,-21 2,-2 5,-10 2,43 1,-11-4,-8-10,-79 8,-7-8,-30 12,51 0,71 0,-58 0,10 0,63 1,19-2,-39-8,6-2,0 2,-3 6,1 2,-3-2,-3-6,-3-3,-12 4,-7 7,-18 2,-3-1,-48 0,-21 0</inkml:trace>
+</inkml:ink>
+</file>
+
+<file path=ppt/ink/ink18.xml><?xml version="1.0" encoding="utf-8"?>
+<inkml:ink xmlns:inkml="http://www.w3.org/2003/InkML">
+  <inkml:definitions>
+    <inkml:context xml:id="ctx0">
+      <inkml:inkSource xml:id="inkSrc0">
+        <inkml:traceFormat>
+          <inkml:channel name="X" type="integer" min="-2.14748E9" max="2.14748E9" units="cm"/>
+          <inkml:channel name="Y" type="integer" min="-2.14748E9" max="2.14748E9" units="cm"/>
+        </inkml:traceFormat>
+        <inkml:channelProperties>
+          <inkml:channelProperty channel="X" name="resolution" value="1000" units="1/cm"/>
+          <inkml:channelProperty channel="Y" name="resolution" value="1000" units="1/cm"/>
+        </inkml:channelProperties>
+      </inkml:inkSource>
+      <inkml:timestamp xml:id="ts0" timeString="2025-06-23T12:59:58.914"/>
+    </inkml:context>
+    <inkml:brush xml:id="br0">
+      <inkml:brushProperty name="width" value="0.08819" units="cm"/>
+      <inkml:brushProperty name="height" value="0.35278" units="cm"/>
+      <inkml:brushProperty name="color" value="#FFFF00"/>
+      <inkml:brushProperty name="tip" value="rectangle"/>
+      <inkml:brushProperty name="rasterOp" value="maskPen"/>
+    </inkml:brush>
+  </inkml:definitions>
+  <inkml:trace contextRef="#ctx0" brushRef="#br0">6487 18293,'29'0,"107"0,-12 18,1-8,29 0,-8 3,8 10,2 0,-1-11,11-2,-11 2,-1 10,0-3,-5-14,11-6,-2 2,-15 5,-3 2,3-3,13-3,2-3,-10 0,10 1,-12 0,-21 0,-6 0,-9 0,0 0,10 0,2 0,7 2,2-4,-2-8,3-1,26 8,0 0,-27-7,-1-2,21 3,-8 1,-58 7,-2-2,29-14,1-3,-27 10,4 0,67-12,10-3,-20 2,7 1,-1 4,11 0,-10 0,6-6,-10 3,0 7,-16 0,-4-16,10 9,-27-9,8-3,-5 8,10 2,23-3,17-2,-14 5,-14 9,-1 1,4-3,9-3,-16 6,-28 10,-10 1,-5-8,-5 1,48 9,-86-8,-1 5,-24-5,-1 8,119 0,-50 11,8 0,17-9,9 1,-6 10,7 4,-4-1,22-2,-1 0,15 8,0 3,-7-1,-10-3,-50-9,-7-2,57 10,-79-20,-54 0</inkml:trace>
+</inkml:ink>
+</file>
+
+<file path=ppt/ink/ink19.xml><?xml version="1.0" encoding="utf-8"?>
+<inkml:ink xmlns:inkml="http://www.w3.org/2003/InkML">
+  <inkml:definitions>
+    <inkml:context xml:id="ctx0">
+      <inkml:inkSource xml:id="inkSrc0">
+        <inkml:traceFormat>
+          <inkml:channel name="X" type="integer" min="-2.14748E9" max="2.14748E9" units="cm"/>
+          <inkml:channel name="Y" type="integer" min="-2.14748E9" max="2.14748E9" units="cm"/>
+        </inkml:traceFormat>
+        <inkml:channelProperties>
+          <inkml:channelProperty channel="X" name="resolution" value="1000" units="1/cm"/>
+          <inkml:channelProperty channel="Y" name="resolution" value="1000" units="1/cm"/>
+        </inkml:channelProperties>
+      </inkml:inkSource>
+      <inkml:timestamp xml:id="ts0" timeString="2025-06-23T13:19:31.057"/>
+    </inkml:context>
+    <inkml:brush xml:id="br0">
+      <inkml:brushProperty name="width" value="0.08819" units="cm"/>
+      <inkml:brushProperty name="height" value="0.35278" units="cm"/>
+      <inkml:brushProperty name="color" value="#FFFF00"/>
+      <inkml:brushProperty name="tip" value="rectangle"/>
+      <inkml:brushProperty name="rasterOp" value="maskPen"/>
+    </inkml:brush>
+  </inkml:definitions>
+  <inkml:trace contextRef="#ctx0" brushRef="#br0">26596 35249,'0'29,"15"50,9 61,11 10,-16-52,0-4,13 20,1 16,-17-38,10-1,-23-27,7-29,-10-3,0-13,0 29,0-8,0 63,0-28,-10 16,7-9,-23 9,23 23,-21-31,22-12,-6-53,8 1,21-8,-7-3,17-8,40 0,12-10,10-2,65 7,-41-7,-6 2,-15 10,-10 0,-38 0,-13 0,-3 0,-14 0,31 0,8 0,77-17,-53 2,19-5,-68 9,-1 11,4 0,30-12,-26 8,2-17,-33 11,-16-9,5 0,-24-108,22 29,-7-9,4-5,23-30,4-19,13 47,1-16,14 17,20-8,-4 29,-13 33,-50 36,-14 15,-69 8,0 0,-53 0,39 0,2 0,-16 0,-50-13,122 10,-22-10,39 13,-40 13,23-10,-43 35,13-6,10 21,10-22,28-10,10-12,-6-7,7 6,-22-8,10 9,-9-7,12 14,-13-3,-2 19,-14-5,13 5,12-20,15-3</inkml:trace>
+</inkml:ink>
+</file>
+
+<file path=ppt/ink/ink2.xml><?xml version="1.0" encoding="utf-8"?>
+<inkml:ink xmlns:inkml="http://www.w3.org/2003/InkML">
+  <inkml:definitions>
+    <inkml:context xml:id="ctx0">
+      <inkml:inkSource xml:id="inkSrc0">
+        <inkml:traceFormat>
+          <inkml:channel name="X" type="integer" min="-2.14748E9" max="2.14748E9" units="cm"/>
+          <inkml:channel name="Y" type="integer" min="-2.14748E9" max="2.14748E9" units="cm"/>
+        </inkml:traceFormat>
+        <inkml:channelProperties>
+          <inkml:channelProperty channel="X" name="resolution" value="1000" units="1/cm"/>
+          <inkml:channelProperty channel="Y" name="resolution" value="1000" units="1/cm"/>
+        </inkml:channelProperties>
+      </inkml:inkSource>
+      <inkml:timestamp xml:id="ts0" timeString="2025-06-23T12:35:39.220"/>
+    </inkml:context>
+    <inkml:brush xml:id="br0">
+      <inkml:brushProperty name="width" value="0.08819" units="cm"/>
+      <inkml:brushProperty name="height" value="0.35278" units="cm"/>
+      <inkml:brushProperty name="color" value="#FFFF00"/>
+      <inkml:brushProperty name="tip" value="rectangle"/>
+      <inkml:brushProperty name="rasterOp" value="maskPen"/>
+    </inkml:brush>
+  </inkml:definitions>
+  <inkml:trace contextRef="#ctx0" brushRef="#br0">12451 9512,'29'0,"-2"0,-8 0,0 0,0 0,0 0,12 0,21 0,0 0,30 0,48 0,-29 0,27 0,36 0,-3 0,-26 1,-2-1,9-1,2-4,10-2,3 0,-3 2,-11 3,0 1,-2 0,2-1,7-4,3-1,-4 0,-10 3,-6 3,-10 1,3 1,25-2,4-1,-20 5,-30 7,-11-1,-5-6,-2-1,0 8,-4 0,47-10,-43-9,4 0,-3 8,2-2,27-14,-1 0,-31 14,-2 1,12-7,-2 1,49 8,-14-10,-3-2,-5 7,-24-7,-13 2,-48 10,9 0,8 0,0 0,52 0,-47 0,47 0,21 12,17 2,-5-10,16-1,-33 1,18 2,8 1,-1-2,-11-1,36-2,-8-3,1 0,-26 1,4 0,-5 0,-15 0,22 0,-22 0,13 0,-77 0,4 0,-39 0,119 0,-44 15,57-1,17 0,-58-3,-1-1,44 4,-4-4,-58-9,-11-2,34 1,-65 0,-12 0,11 0,36 0,5 0,38 0,-17 0,23 0,-1 0,0 15,-21-11,-6 11,-52-7,-7-6,-30 7,0-9,12 0,-9 0,23 0,-10 0,-1 0,6 0,-19 0,6 0,13 0,-16 0,29 0,-31 0,10 0,-13 0,-1 0,1 0,0 8,0-6,0 7,-1-9,1 0,0 0,-9 0,-1 0</inkml:trace>
+</inkml:ink>
+</file>
+
+<file path=ppt/ink/ink3.xml><?xml version="1.0" encoding="utf-8"?>
+<inkml:ink xmlns:inkml="http://www.w3.org/2003/InkML">
+  <inkml:definitions>
+    <inkml:context xml:id="ctx0">
+      <inkml:inkSource xml:id="inkSrc0">
+        <inkml:traceFormat>
+          <inkml:channel name="X" type="integer" min="-2.14748E9" max="2.14748E9" units="cm"/>
+          <inkml:channel name="Y" type="integer" min="-2.14748E9" max="2.14748E9" units="cm"/>
+        </inkml:traceFormat>
+        <inkml:channelProperties>
+          <inkml:channelProperty channel="X" name="resolution" value="1000" units="1/cm"/>
+          <inkml:channelProperty channel="Y" name="resolution" value="1000" units="1/cm"/>
+        </inkml:channelProperties>
+      </inkml:inkSource>
+      <inkml:timestamp xml:id="ts0" timeString="2025-06-23T12:36:40.996"/>
+    </inkml:context>
+    <inkml:brush xml:id="br0">
+      <inkml:brushProperty name="width" value="0.08819" units="cm"/>
+      <inkml:brushProperty name="height" value="0.35278" units="cm"/>
+      <inkml:brushProperty name="color" value="#FFFF00"/>
+      <inkml:brushProperty name="tip" value="rectangle"/>
+      <inkml:brushProperty name="rasterOp" value="maskPen"/>
+    </inkml:brush>
+  </inkml:definitions>
+  <inkml:trace contextRef="#ctx0" brushRef="#br0">26906 9448,'29'0,"28"0,-1 13,79-10,-37 10,58-13,-81 10,-1-7,-13 7,-22-10,14 0,-22 0,-20 9,5-7,-5 6,8-8,-1 0,-7 9,6-7,-7 6,9-8,30 0,-10 11,43-9,-30 9,13-11,3 0,-28 0,5 8,-28-6,6 7,-1-9,9 8,-12-6,13 17,-10-16,61 7,-38-10,29 0,-43 0,-20 0,-3 0</inkml:trace>
+</inkml:ink>
+</file>
+
+<file path=ppt/ink/ink4.xml><?xml version="1.0" encoding="utf-8"?>
+<inkml:ink xmlns:inkml="http://www.w3.org/2003/InkML">
+  <inkml:definitions>
+    <inkml:context xml:id="ctx0">
+      <inkml:inkSource xml:id="inkSrc0">
+        <inkml:traceFormat>
+          <inkml:channel name="X" type="integer" min="-2.14748E9" max="2.14748E9" units="cm"/>
+          <inkml:channel name="Y" type="integer" min="-2.14748E9" max="2.14748E9" units="cm"/>
+        </inkml:traceFormat>
+        <inkml:channelProperties>
+          <inkml:channelProperty channel="X" name="resolution" value="1000" units="1/cm"/>
+          <inkml:channelProperty channel="Y" name="resolution" value="1000" units="1/cm"/>
+        </inkml:channelProperties>
+      </inkml:inkSource>
+      <inkml:timestamp xml:id="ts0" timeString="2025-06-23T12:38:22.514"/>
+    </inkml:context>
+    <inkml:brush xml:id="br0">
+      <inkml:brushProperty name="width" value="0.08819" units="cm"/>
+      <inkml:brushProperty name="height" value="0.35278" units="cm"/>
+      <inkml:brushProperty name="color" value="#FFFF00"/>
+      <inkml:brushProperty name="tip" value="rectangle"/>
+      <inkml:brushProperty name="rasterOp" value="maskPen"/>
+    </inkml:brush>
+  </inkml:definitions>
+  <inkml:trace contextRef="#ctx0" brushRef="#br0">29396 10286,'81'-25,"37"-4,-25 9,13 1,46-6,4 3,-32 9,3 1,-6-4,8-1,-12 4,-10 11,-3-1,40-18,3 0,-30 18,-1 1,15-6,1-3,-13 1,-5 3,-12 6,-5-3,64-28,-47 28,-27-12,13-2,7 8,11 3,-6-3,10-9,1-2,1 6,9 0,-19 2,28-6,-50 1,3 1,5 14,-1 2,-11-7,0-1,23-1,-3 3,34 2,19-12,-62 16,-6 2,18-1,10-9,-2-2,-31 7,3-5,5-2,44-6,-60 7,8-2,19-3,13-3,-2 3,25 3,12 0,-14-2,18-5,7 0,-3-1,-2 1,1-1,-1 0,-7 1,-21 4,-6 0,-1 0,2-2,11-4,6-3,-9 2,-23 8,-18 11,-13 2,81-14,-12 15,-93 0,16-8,-34 5,-20-5,20 8,47 8,13 1,24-4,-17 4,-5-1,-15-8,-40 0,1 0,-13 0,-12 0,-15 0</inkml:trace>
+</inkml:ink>
+</file>
+
+<file path=ppt/ink/ink5.xml><?xml version="1.0" encoding="utf-8"?>
+<inkml:ink xmlns:inkml="http://www.w3.org/2003/InkML">
+  <inkml:definitions>
+    <inkml:context xml:id="ctx0">
+      <inkml:inkSource xml:id="inkSrc0">
+        <inkml:traceFormat>
+          <inkml:channel name="X" type="integer" min="-2.14748E9" max="2.14748E9" units="cm"/>
+          <inkml:channel name="Y" type="integer" min="-2.14748E9" max="2.14748E9" units="cm"/>
+        </inkml:traceFormat>
+        <inkml:channelProperties>
+          <inkml:channelProperty channel="X" name="resolution" value="1000" units="1/cm"/>
+          <inkml:channelProperty channel="Y" name="resolution" value="1000" units="1/cm"/>
+        </inkml:channelProperties>
+      </inkml:inkSource>
+      <inkml:timestamp xml:id="ts0" timeString="2025-06-23T12:39:08.816"/>
+    </inkml:context>
+    <inkml:brush xml:id="br0">
+      <inkml:brushProperty name="width" value="0.08819" units="cm"/>
+      <inkml:brushProperty name="height" value="0.35278" units="cm"/>
+      <inkml:brushProperty name="color" value="#FFFF00"/>
+      <inkml:brushProperty name="tip" value="rectangle"/>
+      <inkml:brushProperty name="rasterOp" value="maskPen"/>
+    </inkml:brush>
+  </inkml:definitions>
+  <inkml:trace contextRef="#ctx0" brushRef="#br0">40587 9901,'164'0,"-1"0,1 0,0 0,-1 0,1 0,0 0,0 0,-1 0,1 0,8 0,2 0,-3 0,-11 0,-15 0,-21 0,-28 0,66 0,-65-1,4 2,13 8,5 1,24-9,13 3,-39 12,9 8,3 0,-6-6,7-11,-5-6,10 6,9 11,12 6,3 2,-4-6,-17-7,-3-4,1-1,6-1,-4 1,7-1,2-1,0 1,-5-1,18 3,-3 0,-2-1,5-3,-18-3,8-1,-2-2,-10 0,-18 0,26 1,-16 0,17 0,-27 0,-68 0,79-20,40-17,-57 6,8-6,6-3,7 1,-2 4,7 1,5-1,5-3,6-3,-11 1,7-5,6-3,2-1,0 1,-3 3,-5 4,0 4,-3 3,-3 2,0 2,0-2,2-2,10-4,5-2,0-2,-3 2,-7 3,-13 5,3 3,-9 5,-9 3,-10 1,46-10,-31 3,-40 2,35 7,-62-7,62 7,-86 8,10 10,0 0,29 0,39 2,23-4,-28-12,6-6,0 1,-1 4,0 1,-2-5,56-18,-24-2,-37 1,-64 23,-51 15,-100 0,15 0,-1 7,-6 3,-45 9,20 13,32-5,-3 3,12-1,-5 1,-46 5,0-2,45-3,7-5,-64-3,109-11,12-11,15 0</inkml:trace>
+</inkml:ink>
+</file>
+
+<file path=ppt/ink/ink6.xml><?xml version="1.0" encoding="utf-8"?>
+<inkml:ink xmlns:inkml="http://www.w3.org/2003/InkML">
+  <inkml:definitions>
+    <inkml:context xml:id="ctx0">
+      <inkml:inkSource xml:id="inkSrc0">
+        <inkml:traceFormat>
+          <inkml:channel name="X" type="integer" min="-2.14748E9" max="2.14748E9" units="cm"/>
+          <inkml:channel name="Y" type="integer" min="-2.14748E9" max="2.14748E9" units="cm"/>
+        </inkml:traceFormat>
+        <inkml:channelProperties>
+          <inkml:channelProperty channel="X" name="resolution" value="1000" units="1/cm"/>
+          <inkml:channelProperty channel="Y" name="resolution" value="1000" units="1/cm"/>
+        </inkml:channelProperties>
+      </inkml:inkSource>
+      <inkml:timestamp xml:id="ts0" timeString="2025-06-23T12:39:09.775"/>
+    </inkml:context>
+    <inkml:brush xml:id="br0">
+      <inkml:brushProperty name="width" value="0.08819" units="cm"/>
+      <inkml:brushProperty name="height" value="0.35278" units="cm"/>
+      <inkml:brushProperty name="color" value="#FFFF00"/>
+      <inkml:brushProperty name="tip" value="rectangle"/>
+      <inkml:brushProperty name="rasterOp" value="maskPen"/>
+    </inkml:brush>
+  </inkml:definitions>
+  <inkml:trace contextRef="#ctx0" brushRef="#br0">54724 7536,'-11'95,"0"0,-2-7,1 8,2 20,1 15,1-4,-3 32,3 0,6-31,3 4,0-9,-1 8,0-12,0-17,0-15,0-13,0-43,0-12,0 0,0 13,0 20,0 39,0 22,0-30,0-13,0-51,0 0,0-9,0-2</inkml:trace>
+</inkml:ink>
+</file>
+
+<file path=ppt/ink/ink7.xml><?xml version="1.0" encoding="utf-8"?>
+<inkml:ink xmlns:inkml="http://www.w3.org/2003/InkML">
+  <inkml:definitions>
+    <inkml:context xml:id="ctx0">
+      <inkml:inkSource xml:id="inkSrc0">
+        <inkml:traceFormat>
+          <inkml:channel name="X" type="integer" min="-2.14748E9" max="2.14748E9" units="cm"/>
+          <inkml:channel name="Y" type="integer" min="-2.14748E9" max="2.14748E9" units="cm"/>
+        </inkml:traceFormat>
+        <inkml:channelProperties>
+          <inkml:channelProperty channel="X" name="resolution" value="1000" units="1/cm"/>
+          <inkml:channelProperty channel="Y" name="resolution" value="1000" units="1/cm"/>
+        </inkml:channelProperties>
+      </inkml:inkSource>
+      <inkml:timestamp xml:id="ts0" timeString="2025-06-23T12:39:55.096"/>
+    </inkml:context>
+    <inkml:brush xml:id="br0">
+      <inkml:brushProperty name="width" value="0.08819" units="cm"/>
+      <inkml:brushProperty name="height" value="0.35278" units="cm"/>
+      <inkml:brushProperty name="color" value="#FFFF00"/>
+      <inkml:brushProperty name="tip" value="rectangle"/>
+      <inkml:brushProperty name="rasterOp" value="maskPen"/>
+    </inkml:brush>
+  </inkml:definitions>
+  <inkml:trace contextRef="#ctx0" brushRef="#br0">55674 9567,'91'39,"-1"-2,-20-10,6-2,8 5,0 8,0 2,7-7,3 1,15 16,-5-4,16-9,-38-2,-2-2,16-10,-9 7,-40-20,66 10,47 15,-52-19,16 0,-4 0,27 8,0-2,-28-10,3-2,-11-1,-7 2,-9-3,1-8,-4 0,50 15,-3-12,15-2,-42 4,2 1,5-2,27-2,6-3,-6 0,-27 1,-4 0,-4 0,44 0,-16 0,3 0,19 0,-64 0,-11 0,-51 0,-3 0,-22-21,29-44,-19-10,13-33,-20 39,-13 4,-11 17,-6-38,-28-11,10-16,-16-43,21 57,-1-18,3 35,14 30,-7 0,19 20,-6 14,8 7,0 3</inkml:trace>
+</inkml:ink>
+</file>
+
+<file path=ppt/ink/ink8.xml><?xml version="1.0" encoding="utf-8"?>
+<inkml:ink xmlns:inkml="http://www.w3.org/2003/InkML">
+  <inkml:definitions>
+    <inkml:context xml:id="ctx0">
+      <inkml:inkSource xml:id="inkSrc0">
+        <inkml:traceFormat>
+          <inkml:channel name="X" type="integer" min="-2.14748E9" max="2.14748E9" units="cm"/>
+          <inkml:channel name="Y" type="integer" min="-2.14748E9" max="2.14748E9" units="cm"/>
+        </inkml:traceFormat>
+        <inkml:channelProperties>
+          <inkml:channelProperty channel="X" name="resolution" value="1000" units="1/cm"/>
+          <inkml:channelProperty channel="Y" name="resolution" value="1000" units="1/cm"/>
+        </inkml:channelProperties>
+      </inkml:inkSource>
+      <inkml:timestamp xml:id="ts0" timeString="2025-06-23T12:49:34.956"/>
+    </inkml:context>
+    <inkml:brush xml:id="br0">
+      <inkml:brushProperty name="width" value="0.08819" units="cm"/>
+      <inkml:brushProperty name="height" value="0.35278" units="cm"/>
+      <inkml:brushProperty name="color" value="#FFFF00"/>
+      <inkml:brushProperty name="tip" value="rectangle"/>
+      <inkml:brushProperty name="rasterOp" value="maskPen"/>
+    </inkml:brush>
+  </inkml:definitions>
+  <inkml:trace contextRef="#ctx0" brushRef="#br0">41288 7234,'0'58,"9"71,6 53,-4 3,-7-55,-4 0,1 4,3 6,6 4,3 8,1 3,0-1,-5-7,-5 11,-4-4,-1-6,4-9,5-1,1-10,-2-11,-6-6,-2-11,1 66,0-134,0-13,8-9,-6 20,32 13,-6 9,13 13,35 31,-7-13,-6-9,6 2,38 31,12-1,0-39,9-10,-43-25,3-3,55 21,14-7,-46-29,2-10,8 0,34 3,9-1,2-2,-39-2,0-1,2-2,2-1,12-2,3-3,1 0,-3 1,-11 4,-1 1,-1 1,-1-3,-5-2,0-2,-1 0,2 2,6 3,1 3,2 0,3-1,14 0,3 0,3 0,1 0,-26 0,1 0,1 0,1 0,1 0,7 0,2 0,1 0,-1 0,-5 0,22 0,-2 0,-7 0,-10 0,-5 1,-10 0,-13-3,-7-4,-12-1,59 4,-9-10,-45 11,17 2,4 2,17 7,5 2,2-2,5-6,2-2,0 2,2 6,0 2,9-2,-8-7,10-2,1-1,-9 0,-32 0,-8 0,3 1,14 2,11 2,17 2,9 1,1 0,-6-1,-13-1,12-2,-12-2,-1 1,8 1,-3 4,9 2,2 0,-4-1,-11-5,-7-7,-7-3,-6-1,-10 2,-1 5,-9 1,-11-5,18-11,-50 0,-72 14,-2-15,-28-6,-27-60,-14-14,-12-12,-9-7,-7-10,11-2,-5-13,-5-2,13 30,-4-2,-3 0,0-3,-3-7,0-4,-2 1,-1 2,-2 4,-1 1,-2 2,-3 2,-8-3,-4 1,0 3,3 6,16 17,3 4,1 2,-1 4,-27-19,0 4,8 7,-11-13,8 11,16 20,11 10,-11-8,-13-22,66 66,30 10,0 6,-12-10,-28-35,-71-44,39 15,8 26,3 4,23 5,-17 15,42 14,14 21,-14 0,10 0,-22 0,-87 0,20 0,-9 0,-9 0,28-1,-5 2,0 5,-10 2,0 2,-3-1,0 0,-1 3,1 4,-1 2,2-3,3-3,2-3,2-1,-41 3,5-2,8 2,6-3,21-6,4 1,-3 16,8-1,-17-14,13 15,-4-1,-39-13,40 12,2 3,-34-1,2 15,49-15,-5 0,-10 1,-8-1,4-2,-9-1,0 0,5 1,-1-1,-9 1,-8-1,-12 0,-3-1,1-2,2-4,-1-3,1 0,0 3,-1 3,-1 4,1-2,4-4,-28-5,4-6,4 3,16 5,5 1,7-1,-15-6,2-2,21 1,-7 0,6 0,-29 0,11 0,34 0,5 0,4 0,13 0,15 0,41 0,13 0,0 0,-12 0,-4-11,-30-4,-26 1,-49-16,60 26,-8 3,-63-8,2 1,-7 8,20 0,15 0,63 0,-15 8,49 3,16 8,8-1,0-7,0-3</inkml:trace>
+</inkml:ink>
+</file>
+
+<file path=ppt/ink/ink9.xml><?xml version="1.0" encoding="utf-8"?>
+<inkml:ink xmlns:inkml="http://www.w3.org/2003/InkML">
+  <inkml:definitions>
+    <inkml:context xml:id="ctx0">
+      <inkml:inkSource xml:id="inkSrc0">
+        <inkml:traceFormat>
+          <inkml:channel name="X" type="integer" min="-2.14748E9" max="2.14748E9" units="cm"/>
+          <inkml:channel name="Y" type="integer" min="-2.14748E9" max="2.14748E9" units="cm"/>
+        </inkml:traceFormat>
+        <inkml:channelProperties>
+          <inkml:channelProperty channel="X" name="resolution" value="1000" units="1/cm"/>
+          <inkml:channelProperty channel="Y" name="resolution" value="1000" units="1/cm"/>
+        </inkml:channelProperties>
+      </inkml:inkSource>
+      <inkml:timestamp xml:id="ts0" timeString="2025-06-23T12:49:46.816"/>
+    </inkml:context>
+    <inkml:brush xml:id="br0">
+      <inkml:brushProperty name="width" value="0.08819" units="cm"/>
+      <inkml:brushProperty name="height" value="0.35278" units="cm"/>
+      <inkml:brushProperty name="color" value="#FFFF00"/>
+      <inkml:brushProperty name="tip" value="rectangle"/>
+      <inkml:brushProperty name="rasterOp" value="maskPen"/>
+    </inkml:brush>
+  </inkml:definitions>
+  <inkml:trace contextRef="#ctx0" brushRef="#br0">41354 7342,'-30'81,"7"11,-25 43,20-55,2 2,7 2,-3 0,-12 2,-1-4,0 41,2-50,14-41,17-13,-6 0,0 0,5 29,-15-9,4 26,1-17,3 0,-1-1,8 40,-7-43,10 105,0-59,0 2,0 4,0 24,7-28,3-2,7 9,19 57,-20-16,12-20,-10 36,29-42,-9 21,10 0,1 0,-21-55,1 2,6 1,4 2,9 14,-1-3,11 33,17-17,-50-77,6-11,1-6,42 15,22 0,10-6,15 2,21 6,7-2,-33-13,4-3,-3 2,45 17,-7-1,-31-13,-14-3,13 2,-37-6,-21-2,52-10,3 10,20-13,16 0,-57-13,35-3,-48 0,-16-7,12 20,-43-16,40 17,-40-17,26 16,-31-7,-2 10,-5-9,24 7,62-23,-26 3,3 0,47-5,24-12,-122 31,22 6,-39-7,10 9,-13 0,0 0,-9 0,-2 0</inkml:trace>
+</inkml:ink>
+</file>
+
 <file path=ppt/notesMasters/notesMaster1.xml><?xml version="1.0" encoding="utf-8"?>
 <p:notesMaster xmlns:a="http://schemas.openxmlformats.org/drawingml/2006/main" xmlns:r="http://schemas.openxmlformats.org/officeDocument/2006/relationships" xmlns:p="http://schemas.openxmlformats.org/presentationml/2006/main">
   <p:cSld>
@@ -3418,7 +3950,7 @@
               <a:t>Vercel</a:t>
             </a:r>
             <a:r>
-              <a:rPr lang="it-IT"/>
+              <a:rPr lang="it-IT" dirty="0"/>
               <a:t> stanno rendendo possibile costruire applicazioni complete senza mai pensare all'infrastruttura sottostante, cambiando radicalmente il modello economico e operativo dello sviluppo web.</a:t>
             </a:r>
           </a:p>
@@ -6633,7 +7165,7 @@
           </a:ln>
           <a:extLst>
             <a:ext uri="{C572A759-6A51-4108-AA02-DFA0A04FC94B}">
-              <ma14:wrappingTextBoxFlag xmlns:ma14="http://schemas.microsoft.com/office/mac/drawingml/2011/main" xmlns:a14="http://schemas.microsoft.com/office/drawing/2010/main" xmlns:m="http://schemas.openxmlformats.org/officeDocument/2006/math" xmlns="" val="1"/>
+              <ma14:wrappingTextBoxFlag xmlns="" xmlns:m="http://schemas.openxmlformats.org/officeDocument/2006/math" xmlns:a14="http://schemas.microsoft.com/office/drawing/2010/main" xmlns:ma14="http://schemas.microsoft.com/office/mac/drawingml/2011/main" val="1"/>
             </a:ext>
           </a:extLst>
         </p:spPr>
@@ -6672,7 +7204,7 @@
           </a:ln>
           <a:extLst>
             <a:ext uri="{C572A759-6A51-4108-AA02-DFA0A04FC94B}">
-              <ma14:wrappingTextBoxFlag xmlns:ma14="http://schemas.microsoft.com/office/mac/drawingml/2011/main" xmlns:a14="http://schemas.microsoft.com/office/drawing/2010/main" xmlns:m="http://schemas.openxmlformats.org/officeDocument/2006/math" xmlns="" val="1"/>
+              <ma14:wrappingTextBoxFlag xmlns="" xmlns:m="http://schemas.openxmlformats.org/officeDocument/2006/math" xmlns:a14="http://schemas.microsoft.com/office/drawing/2010/main" xmlns:ma14="http://schemas.microsoft.com/office/mac/drawingml/2011/main" val="1"/>
             </a:ext>
           </a:extLst>
         </p:spPr>
@@ -7553,7 +8085,7 @@
           </a:prstGeom>
           <a:extLst>
             <a:ext uri="{C572A759-6A51-4108-AA02-DFA0A04FC94B}">
-              <ma14:wrappingTextBoxFlag xmlns:ma14="http://schemas.microsoft.com/office/mac/drawingml/2011/main" xmlns:a14="http://schemas.microsoft.com/office/drawing/2010/main" xmlns:m="http://schemas.openxmlformats.org/officeDocument/2006/math" xmlns="" val="1"/>
+              <ma14:wrappingTextBoxFlag xmlns="" xmlns:m="http://schemas.openxmlformats.org/officeDocument/2006/math" xmlns:a14="http://schemas.microsoft.com/office/drawing/2010/main" xmlns:ma14="http://schemas.microsoft.com/office/mac/drawingml/2011/main" val="1"/>
             </a:ext>
           </a:extLst>
         </p:spPr>
@@ -8594,6 +9126,57 @@
           </a:p>
         </p:txBody>
       </p:sp>
+      <mc:AlternateContent xmlns:mc="http://schemas.openxmlformats.org/markup-compatibility/2006">
+        <mc:Choice xmlns:p14="http://schemas.microsoft.com/office/powerpoint/2010/main" Requires="p14">
+          <p:contentPart p14:bwMode="auto" r:id="rId3">
+            <p14:nvContentPartPr>
+              <p14:cNvPr id="2" name="Input penna 1">
+                <a:extLst>
+                  <a:ext uri="{FF2B5EF4-FFF2-40B4-BE49-F238E27FC236}">
+                    <a16:creationId xmlns:a16="http://schemas.microsoft.com/office/drawing/2014/main" id="{87B6B8AD-E66F-F40B-2E73-C937F5A9A396}"/>
+                  </a:ext>
+                </a:extLst>
+              </p14:cNvPr>
+              <p14:cNvContentPartPr/>
+              <p14:nvPr/>
+            </p14:nvContentPartPr>
+            <p14:xfrm>
+              <a:off x="9574560" y="12689640"/>
+              <a:ext cx="758160" cy="727920"/>
+            </p14:xfrm>
+          </p:contentPart>
+        </mc:Choice>
+        <mc:Fallback>
+          <p:pic>
+            <p:nvPicPr>
+              <p:cNvPr id="2" name="Input penna 1">
+                <a:extLst>
+                  <a:ext uri="{FF2B5EF4-FFF2-40B4-BE49-F238E27FC236}">
+                    <a16:creationId xmlns:a16="http://schemas.microsoft.com/office/drawing/2014/main" id="{87B6B8AD-E66F-F40B-2E73-C937F5A9A396}"/>
+                  </a:ext>
+                </a:extLst>
+              </p:cNvPr>
+              <p:cNvPicPr/>
+              <p:nvPr/>
+            </p:nvPicPr>
+            <p:blipFill>
+              <a:blip r:embed="rId4"/>
+              <a:stretch>
+                <a:fillRect/>
+              </a:stretch>
+            </p:blipFill>
+            <p:spPr>
+              <a:xfrm>
+                <a:off x="9558720" y="12626280"/>
+                <a:ext cx="789480" cy="854640"/>
+              </a:xfrm>
+              <a:prstGeom prst="rect">
+                <a:avLst/>
+              </a:prstGeom>
+            </p:spPr>
+          </p:pic>
+        </mc:Fallback>
+      </mc:AlternateContent>
     </p:spTree>
     <p:extLst>
       <p:ext uri="{BB962C8B-B14F-4D97-AF65-F5344CB8AC3E}">
@@ -9049,7 +9632,7 @@
           </a:ln>
           <a:extLst>
             <a:ext uri="{C572A759-6A51-4108-AA02-DFA0A04FC94B}">
-              <ma14:wrappingTextBoxFlag xmlns:ma14="http://schemas.microsoft.com/office/mac/drawingml/2011/main" xmlns:a14="http://schemas.microsoft.com/office/drawing/2010/main" xmlns:m="http://schemas.openxmlformats.org/officeDocument/2006/math" xmlns="" val="1"/>
+              <ma14:wrappingTextBoxFlag xmlns="" xmlns:m="http://schemas.openxmlformats.org/officeDocument/2006/math" xmlns:a14="http://schemas.microsoft.com/office/drawing/2010/main" xmlns:ma14="http://schemas.microsoft.com/office/mac/drawingml/2011/main" val="1"/>
             </a:ext>
           </a:extLst>
         </p:spPr>
@@ -11840,7 +12423,7 @@
           </a:ln>
           <a:extLst>
             <a:ext uri="{C572A759-6A51-4108-AA02-DFA0A04FC94B}">
-              <ma14:wrappingTextBoxFlag xmlns:ma14="http://schemas.microsoft.com/office/mac/drawingml/2011/main" xmlns:a14="http://schemas.microsoft.com/office/drawing/2010/main" xmlns:m="http://schemas.openxmlformats.org/officeDocument/2006/math" xmlns="" val="1"/>
+              <ma14:wrappingTextBoxFlag xmlns="" xmlns:m="http://schemas.openxmlformats.org/officeDocument/2006/math" xmlns:a14="http://schemas.microsoft.com/office/drawing/2010/main" xmlns:ma14="http://schemas.microsoft.com/office/mac/drawingml/2011/main" val="1"/>
             </a:ext>
           </a:extLst>
         </p:spPr>
@@ -12173,7 +12756,7 @@
           </a:ln>
           <a:extLst>
             <a:ext uri="{C572A759-6A51-4108-AA02-DFA0A04FC94B}">
-              <ma14:wrappingTextBoxFlag xmlns:ma14="http://schemas.microsoft.com/office/mac/drawingml/2011/main" xmlns:a14="http://schemas.microsoft.com/office/drawing/2010/main" xmlns:m="http://schemas.openxmlformats.org/officeDocument/2006/math" xmlns="" val="1"/>
+              <ma14:wrappingTextBoxFlag xmlns="" xmlns:m="http://schemas.openxmlformats.org/officeDocument/2006/math" xmlns:a14="http://schemas.microsoft.com/office/drawing/2010/main" xmlns:ma14="http://schemas.microsoft.com/office/mac/drawingml/2011/main" val="1"/>
             </a:ext>
           </a:extLst>
         </p:spPr>
@@ -13046,7 +13629,7 @@
           </a:ln>
           <a:extLst>
             <a:ext uri="{C572A759-6A51-4108-AA02-DFA0A04FC94B}">
-              <ma14:wrappingTextBoxFlag xmlns:ma14="http://schemas.microsoft.com/office/mac/drawingml/2011/main" xmlns:a14="http://schemas.microsoft.com/office/drawing/2010/main" xmlns:m="http://schemas.openxmlformats.org/officeDocument/2006/math" xmlns="" val="1"/>
+              <ma14:wrappingTextBoxFlag xmlns="" xmlns:m="http://schemas.openxmlformats.org/officeDocument/2006/math" xmlns:a14="http://schemas.microsoft.com/office/drawing/2010/main" xmlns:ma14="http://schemas.microsoft.com/office/mac/drawingml/2011/main" val="1"/>
             </a:ext>
           </a:extLst>
         </p:spPr>
@@ -13951,6 +14534,465 @@
           </a:p>
         </p:txBody>
       </p:sp>
+      <mc:AlternateContent xmlns:mc="http://schemas.openxmlformats.org/markup-compatibility/2006">
+        <mc:Choice xmlns:p14="http://schemas.microsoft.com/office/powerpoint/2010/main" Requires="p14">
+          <p:contentPart p14:bwMode="auto" r:id="rId3">
+            <p14:nvContentPartPr>
+              <p14:cNvPr id="2" name="Input penna 1">
+                <a:extLst>
+                  <a:ext uri="{FF2B5EF4-FFF2-40B4-BE49-F238E27FC236}">
+                    <a16:creationId xmlns:a16="http://schemas.microsoft.com/office/drawing/2014/main" id="{F4604466-BA6A-B25A-609B-7842C2B67BBA}"/>
+                  </a:ext>
+                </a:extLst>
+              </p14:cNvPr>
+              <p14:cNvContentPartPr/>
+              <p14:nvPr/>
+            </p14:nvContentPartPr>
+            <p14:xfrm>
+              <a:off x="2274840" y="3097800"/>
+              <a:ext cx="1644840" cy="31320"/>
+            </p14:xfrm>
+          </p:contentPart>
+        </mc:Choice>
+        <mc:Fallback>
+          <p:pic>
+            <p:nvPicPr>
+              <p:cNvPr id="2" name="Input penna 1">
+                <a:extLst>
+                  <a:ext uri="{FF2B5EF4-FFF2-40B4-BE49-F238E27FC236}">
+                    <a16:creationId xmlns:a16="http://schemas.microsoft.com/office/drawing/2014/main" id="{F4604466-BA6A-B25A-609B-7842C2B67BBA}"/>
+                  </a:ext>
+                </a:extLst>
+              </p:cNvPr>
+              <p:cNvPicPr/>
+              <p:nvPr/>
+            </p:nvPicPr>
+            <p:blipFill>
+              <a:blip r:embed="rId4"/>
+              <a:stretch>
+                <a:fillRect/>
+              </a:stretch>
+            </p:blipFill>
+            <p:spPr>
+              <a:xfrm>
+                <a:off x="2259000" y="3034440"/>
+                <a:ext cx="1676160" cy="158040"/>
+              </a:xfrm>
+              <a:prstGeom prst="rect">
+                <a:avLst/>
+              </a:prstGeom>
+            </p:spPr>
+          </p:pic>
+        </mc:Fallback>
+      </mc:AlternateContent>
+      <mc:AlternateContent xmlns:mc="http://schemas.openxmlformats.org/markup-compatibility/2006">
+        <mc:Choice xmlns:p14="http://schemas.microsoft.com/office/powerpoint/2010/main" Requires="p14">
+          <p:contentPart p14:bwMode="auto" r:id="rId5">
+            <p14:nvContentPartPr>
+              <p14:cNvPr id="3" name="Input penna 2">
+                <a:extLst>
+                  <a:ext uri="{FF2B5EF4-FFF2-40B4-BE49-F238E27FC236}">
+                    <a16:creationId xmlns:a16="http://schemas.microsoft.com/office/drawing/2014/main" id="{9B9F3E09-2D67-55D7-DFD7-94F4727DC432}"/>
+                  </a:ext>
+                </a:extLst>
+              </p14:cNvPr>
+              <p14:cNvContentPartPr/>
+              <p14:nvPr/>
+            </p14:nvContentPartPr>
+            <p14:xfrm>
+              <a:off x="4482360" y="3375000"/>
+              <a:ext cx="4660920" cy="79200"/>
+            </p14:xfrm>
+          </p:contentPart>
+        </mc:Choice>
+        <mc:Fallback>
+          <p:pic>
+            <p:nvPicPr>
+              <p:cNvPr id="3" name="Input penna 2">
+                <a:extLst>
+                  <a:ext uri="{FF2B5EF4-FFF2-40B4-BE49-F238E27FC236}">
+                    <a16:creationId xmlns:a16="http://schemas.microsoft.com/office/drawing/2014/main" id="{9B9F3E09-2D67-55D7-DFD7-94F4727DC432}"/>
+                  </a:ext>
+                </a:extLst>
+              </p:cNvPr>
+              <p:cNvPicPr/>
+              <p:nvPr/>
+            </p:nvPicPr>
+            <p:blipFill>
+              <a:blip r:embed="rId6"/>
+              <a:stretch>
+                <a:fillRect/>
+              </a:stretch>
+            </p:blipFill>
+            <p:spPr>
+              <a:xfrm>
+                <a:off x="4466520" y="3311640"/>
+                <a:ext cx="4692240" cy="205920"/>
+              </a:xfrm>
+              <a:prstGeom prst="rect">
+                <a:avLst/>
+              </a:prstGeom>
+            </p:spPr>
+          </p:pic>
+        </mc:Fallback>
+      </mc:AlternateContent>
+      <mc:AlternateContent xmlns:mc="http://schemas.openxmlformats.org/markup-compatibility/2006">
+        <mc:Choice xmlns:p14="http://schemas.microsoft.com/office/powerpoint/2010/main" Requires="p14">
+          <p:contentPart p14:bwMode="auto" r:id="rId7">
+            <p14:nvContentPartPr>
+              <p14:cNvPr id="4" name="Input penna 3">
+                <a:extLst>
+                  <a:ext uri="{FF2B5EF4-FFF2-40B4-BE49-F238E27FC236}">
+                    <a16:creationId xmlns:a16="http://schemas.microsoft.com/office/drawing/2014/main" id="{207C7B5E-573E-747E-61BE-2AEEE942B0A7}"/>
+                  </a:ext>
+                </a:extLst>
+              </p14:cNvPr>
+              <p14:cNvContentPartPr/>
+              <p14:nvPr/>
+            </p14:nvContentPartPr>
+            <p14:xfrm>
+              <a:off x="9686160" y="3401280"/>
+              <a:ext cx="667800" cy="63360"/>
+            </p14:xfrm>
+          </p:contentPart>
+        </mc:Choice>
+        <mc:Fallback>
+          <p:pic>
+            <p:nvPicPr>
+              <p:cNvPr id="4" name="Input penna 3">
+                <a:extLst>
+                  <a:ext uri="{FF2B5EF4-FFF2-40B4-BE49-F238E27FC236}">
+                    <a16:creationId xmlns:a16="http://schemas.microsoft.com/office/drawing/2014/main" id="{207C7B5E-573E-747E-61BE-2AEEE942B0A7}"/>
+                  </a:ext>
+                </a:extLst>
+              </p:cNvPr>
+              <p:cNvPicPr/>
+              <p:nvPr/>
+            </p:nvPicPr>
+            <p:blipFill>
+              <a:blip r:embed="rId8"/>
+              <a:stretch>
+                <a:fillRect/>
+              </a:stretch>
+            </p:blipFill>
+            <p:spPr>
+              <a:xfrm>
+                <a:off x="9670320" y="3337920"/>
+                <a:ext cx="699120" cy="190080"/>
+              </a:xfrm>
+              <a:prstGeom prst="rect">
+                <a:avLst/>
+              </a:prstGeom>
+            </p:spPr>
+          </p:pic>
+        </mc:Fallback>
+      </mc:AlternateContent>
+      <mc:AlternateContent xmlns:mc="http://schemas.openxmlformats.org/markup-compatibility/2006">
+        <mc:Choice xmlns:p14="http://schemas.microsoft.com/office/powerpoint/2010/main" Requires="p14">
+          <p:contentPart p14:bwMode="auto" r:id="rId9">
+            <p14:nvContentPartPr>
+              <p14:cNvPr id="5" name="Input penna 4">
+                <a:extLst>
+                  <a:ext uri="{FF2B5EF4-FFF2-40B4-BE49-F238E27FC236}">
+                    <a16:creationId xmlns:a16="http://schemas.microsoft.com/office/drawing/2014/main" id="{61975D64-5F24-9E93-E0FD-FE3D41127F0D}"/>
+                  </a:ext>
+                </a:extLst>
+              </p14:cNvPr>
+              <p14:cNvContentPartPr/>
+              <p14:nvPr/>
+            </p14:nvContentPartPr>
+            <p14:xfrm>
+              <a:off x="10582560" y="3312720"/>
+              <a:ext cx="3949200" cy="390600"/>
+            </p14:xfrm>
+          </p:contentPart>
+        </mc:Choice>
+        <mc:Fallback>
+          <p:pic>
+            <p:nvPicPr>
+              <p:cNvPr id="5" name="Input penna 4">
+                <a:extLst>
+                  <a:ext uri="{FF2B5EF4-FFF2-40B4-BE49-F238E27FC236}">
+                    <a16:creationId xmlns:a16="http://schemas.microsoft.com/office/drawing/2014/main" id="{61975D64-5F24-9E93-E0FD-FE3D41127F0D}"/>
+                  </a:ext>
+                </a:extLst>
+              </p:cNvPr>
+              <p:cNvPicPr/>
+              <p:nvPr/>
+            </p:nvPicPr>
+            <p:blipFill>
+              <a:blip r:embed="rId10"/>
+              <a:stretch>
+                <a:fillRect/>
+              </a:stretch>
+            </p:blipFill>
+            <p:spPr>
+              <a:xfrm>
+                <a:off x="10566720" y="3249360"/>
+                <a:ext cx="3980520" cy="517320"/>
+              </a:xfrm>
+              <a:prstGeom prst="rect">
+                <a:avLst/>
+              </a:prstGeom>
+            </p:spPr>
+          </p:pic>
+        </mc:Fallback>
+      </mc:AlternateContent>
+      <mc:AlternateContent xmlns:mc="http://schemas.openxmlformats.org/markup-compatibility/2006">
+        <mc:Choice xmlns:p14="http://schemas.microsoft.com/office/powerpoint/2010/main" Requires="p14">
+          <p:contentPart p14:bwMode="auto" r:id="rId11">
+            <p14:nvContentPartPr>
+              <p14:cNvPr id="6" name="Input penna 5">
+                <a:extLst>
+                  <a:ext uri="{FF2B5EF4-FFF2-40B4-BE49-F238E27FC236}">
+                    <a16:creationId xmlns:a16="http://schemas.microsoft.com/office/drawing/2014/main" id="{CB04AB6A-B421-8069-D9B0-7390C8197EA2}"/>
+                  </a:ext>
+                </a:extLst>
+              </p14:cNvPr>
+              <p14:cNvContentPartPr/>
+              <p14:nvPr/>
+            </p14:nvContentPartPr>
+            <p14:xfrm>
+              <a:off x="14611320" y="3097440"/>
+              <a:ext cx="5599080" cy="580320"/>
+            </p14:xfrm>
+          </p:contentPart>
+        </mc:Choice>
+        <mc:Fallback>
+          <p:pic>
+            <p:nvPicPr>
+              <p:cNvPr id="6" name="Input penna 5">
+                <a:extLst>
+                  <a:ext uri="{FF2B5EF4-FFF2-40B4-BE49-F238E27FC236}">
+                    <a16:creationId xmlns:a16="http://schemas.microsoft.com/office/drawing/2014/main" id="{CB04AB6A-B421-8069-D9B0-7390C8197EA2}"/>
+                  </a:ext>
+                </a:extLst>
+              </p:cNvPr>
+              <p:cNvPicPr/>
+              <p:nvPr/>
+            </p:nvPicPr>
+            <p:blipFill>
+              <a:blip r:embed="rId12"/>
+              <a:stretch>
+                <a:fillRect/>
+              </a:stretch>
+            </p:blipFill>
+            <p:spPr>
+              <a:xfrm>
+                <a:off x="14595480" y="3034080"/>
+                <a:ext cx="5630400" cy="707040"/>
+              </a:xfrm>
+              <a:prstGeom prst="rect">
+                <a:avLst/>
+              </a:prstGeom>
+            </p:spPr>
+          </p:pic>
+        </mc:Fallback>
+      </mc:AlternateContent>
+      <mc:AlternateContent xmlns:mc="http://schemas.openxmlformats.org/markup-compatibility/2006">
+        <mc:Choice xmlns:p14="http://schemas.microsoft.com/office/powerpoint/2010/main" Requires="p14">
+          <p:contentPart p14:bwMode="auto" r:id="rId13">
+            <p14:nvContentPartPr>
+              <p14:cNvPr id="7" name="Input penna 6">
+                <a:extLst>
+                  <a:ext uri="{FF2B5EF4-FFF2-40B4-BE49-F238E27FC236}">
+                    <a16:creationId xmlns:a16="http://schemas.microsoft.com/office/drawing/2014/main" id="{FD173520-B72A-8A58-1A6E-04B41E1F12A5}"/>
+                  </a:ext>
+                </a:extLst>
+              </p14:cNvPr>
+              <p14:cNvContentPartPr/>
+              <p14:nvPr/>
+            </p14:nvContentPartPr>
+            <p14:xfrm>
+              <a:off x="19666440" y="2712960"/>
+              <a:ext cx="34560" cy="910440"/>
+            </p14:xfrm>
+          </p:contentPart>
+        </mc:Choice>
+        <mc:Fallback>
+          <p:pic>
+            <p:nvPicPr>
+              <p:cNvPr id="7" name="Input penna 6">
+                <a:extLst>
+                  <a:ext uri="{FF2B5EF4-FFF2-40B4-BE49-F238E27FC236}">
+                    <a16:creationId xmlns:a16="http://schemas.microsoft.com/office/drawing/2014/main" id="{FD173520-B72A-8A58-1A6E-04B41E1F12A5}"/>
+                  </a:ext>
+                </a:extLst>
+              </p:cNvPr>
+              <p:cNvPicPr/>
+              <p:nvPr/>
+            </p:nvPicPr>
+            <p:blipFill>
+              <a:blip r:embed="rId14"/>
+              <a:stretch>
+                <a:fillRect/>
+              </a:stretch>
+            </p:blipFill>
+            <p:spPr>
+              <a:xfrm>
+                <a:off x="19650600" y="2649600"/>
+                <a:ext cx="65880" cy="1037160"/>
+              </a:xfrm>
+              <a:prstGeom prst="rect">
+                <a:avLst/>
+              </a:prstGeom>
+            </p:spPr>
+          </p:pic>
+        </mc:Fallback>
+      </mc:AlternateContent>
+      <mc:AlternateContent xmlns:mc="http://schemas.openxmlformats.org/markup-compatibility/2006">
+        <mc:Choice xmlns:p14="http://schemas.microsoft.com/office/powerpoint/2010/main" Requires="p14">
+          <p:contentPart p14:bwMode="auto" r:id="rId15">
+            <p14:nvContentPartPr>
+              <p14:cNvPr id="8" name="Input penna 7">
+                <a:extLst>
+                  <a:ext uri="{FF2B5EF4-FFF2-40B4-BE49-F238E27FC236}">
+                    <a16:creationId xmlns:a16="http://schemas.microsoft.com/office/drawing/2014/main" id="{4FEA1D34-C965-EF6B-6AEC-A6E1061ACECD}"/>
+                  </a:ext>
+                </a:extLst>
+              </p14:cNvPr>
+              <p14:cNvContentPartPr/>
+              <p14:nvPr/>
+            </p14:nvContentPartPr>
+            <p14:xfrm>
+              <a:off x="20042640" y="3237480"/>
+              <a:ext cx="2044440" cy="495720"/>
+            </p14:xfrm>
+          </p:contentPart>
+        </mc:Choice>
+        <mc:Fallback>
+          <p:pic>
+            <p:nvPicPr>
+              <p:cNvPr id="8" name="Input penna 7">
+                <a:extLst>
+                  <a:ext uri="{FF2B5EF4-FFF2-40B4-BE49-F238E27FC236}">
+                    <a16:creationId xmlns:a16="http://schemas.microsoft.com/office/drawing/2014/main" id="{4FEA1D34-C965-EF6B-6AEC-A6E1061ACECD}"/>
+                  </a:ext>
+                </a:extLst>
+              </p:cNvPr>
+              <p:cNvPicPr/>
+              <p:nvPr/>
+            </p:nvPicPr>
+            <p:blipFill>
+              <a:blip r:embed="rId16"/>
+              <a:stretch>
+                <a:fillRect/>
+              </a:stretch>
+            </p:blipFill>
+            <p:spPr>
+              <a:xfrm>
+                <a:off x="20026800" y="3174120"/>
+                <a:ext cx="2075760" cy="622440"/>
+              </a:xfrm>
+              <a:prstGeom prst="rect">
+                <a:avLst/>
+              </a:prstGeom>
+            </p:spPr>
+          </p:pic>
+        </mc:Fallback>
+      </mc:AlternateContent>
+      <mc:AlternateContent xmlns:mc="http://schemas.openxmlformats.org/markup-compatibility/2006">
+        <mc:Choice xmlns:p14="http://schemas.microsoft.com/office/powerpoint/2010/main" Requires="p14">
+          <p:contentPart p14:bwMode="auto" r:id="rId17">
+            <p14:nvContentPartPr>
+              <p14:cNvPr id="9" name="Input penna 8">
+                <a:extLst>
+                  <a:ext uri="{FF2B5EF4-FFF2-40B4-BE49-F238E27FC236}">
+                    <a16:creationId xmlns:a16="http://schemas.microsoft.com/office/drawing/2014/main" id="{1BF39038-C4ED-B254-EE0B-94C956CE5300}"/>
+                  </a:ext>
+                </a:extLst>
+              </p14:cNvPr>
+              <p14:cNvContentPartPr/>
+              <p14:nvPr/>
+            </p14:nvContentPartPr>
+            <p14:xfrm>
+              <a:off x="14704920" y="2507760"/>
+              <a:ext cx="5518440" cy="1670400"/>
+            </p14:xfrm>
+          </p:contentPart>
+        </mc:Choice>
+        <mc:Fallback>
+          <p:pic>
+            <p:nvPicPr>
+              <p:cNvPr id="9" name="Input penna 8">
+                <a:extLst>
+                  <a:ext uri="{FF2B5EF4-FFF2-40B4-BE49-F238E27FC236}">
+                    <a16:creationId xmlns:a16="http://schemas.microsoft.com/office/drawing/2014/main" id="{1BF39038-C4ED-B254-EE0B-94C956CE5300}"/>
+                  </a:ext>
+                </a:extLst>
+              </p:cNvPr>
+              <p:cNvPicPr/>
+              <p:nvPr/>
+            </p:nvPicPr>
+            <p:blipFill>
+              <a:blip r:embed="rId18"/>
+              <a:stretch>
+                <a:fillRect/>
+              </a:stretch>
+            </p:blipFill>
+            <p:spPr>
+              <a:xfrm>
+                <a:off x="14689080" y="2444400"/>
+                <a:ext cx="5549760" cy="1797120"/>
+              </a:xfrm>
+              <a:prstGeom prst="rect">
+                <a:avLst/>
+              </a:prstGeom>
+            </p:spPr>
+          </p:pic>
+        </mc:Fallback>
+      </mc:AlternateContent>
+      <mc:AlternateContent xmlns:mc="http://schemas.openxmlformats.org/markup-compatibility/2006">
+        <mc:Choice xmlns:p14="http://schemas.microsoft.com/office/powerpoint/2010/main" Requires="p14">
+          <p:contentPart p14:bwMode="auto" r:id="rId19">
+            <p14:nvContentPartPr>
+              <p14:cNvPr id="10" name="Input penna 9">
+                <a:extLst>
+                  <a:ext uri="{FF2B5EF4-FFF2-40B4-BE49-F238E27FC236}">
+                    <a16:creationId xmlns:a16="http://schemas.microsoft.com/office/drawing/2014/main" id="{3A067730-F18A-64D5-4243-837240CCF02B}"/>
+                  </a:ext>
+                </a:extLst>
+              </p14:cNvPr>
+              <p14:cNvContentPartPr/>
+              <p14:nvPr/>
+            </p14:nvContentPartPr>
+            <p14:xfrm>
+              <a:off x="14724720" y="2643120"/>
+              <a:ext cx="1726560" cy="1693080"/>
+            </p14:xfrm>
+          </p:contentPart>
+        </mc:Choice>
+        <mc:Fallback>
+          <p:pic>
+            <p:nvPicPr>
+              <p:cNvPr id="10" name="Input penna 9">
+                <a:extLst>
+                  <a:ext uri="{FF2B5EF4-FFF2-40B4-BE49-F238E27FC236}">
+                    <a16:creationId xmlns:a16="http://schemas.microsoft.com/office/drawing/2014/main" id="{3A067730-F18A-64D5-4243-837240CCF02B}"/>
+                  </a:ext>
+                </a:extLst>
+              </p:cNvPr>
+              <p:cNvPicPr/>
+              <p:nvPr/>
+            </p:nvPicPr>
+            <p:blipFill>
+              <a:blip r:embed="rId20"/>
+              <a:stretch>
+                <a:fillRect/>
+              </a:stretch>
+            </p:blipFill>
+            <p:spPr>
+              <a:xfrm>
+                <a:off x="14708880" y="2579760"/>
+                <a:ext cx="1757880" cy="1819800"/>
+              </a:xfrm>
+              <a:prstGeom prst="rect">
+                <a:avLst/>
+              </a:prstGeom>
+            </p:spPr>
+          </p:pic>
+        </mc:Fallback>
+      </mc:AlternateContent>
     </p:spTree>
     <p:extLst>
       <p:ext uri="{BB962C8B-B14F-4D97-AF65-F5344CB8AC3E}">
@@ -14575,6 +15617,465 @@
           </a:prstGeom>
         </p:spPr>
       </p:pic>
+      <mc:AlternateContent xmlns:mc="http://schemas.openxmlformats.org/markup-compatibility/2006">
+        <mc:Choice xmlns:p14="http://schemas.microsoft.com/office/powerpoint/2010/main" Requires="p14">
+          <p:contentPart p14:bwMode="auto" r:id="rId4">
+            <p14:nvContentPartPr>
+              <p14:cNvPr id="2" name="Input penna 1">
+                <a:extLst>
+                  <a:ext uri="{FF2B5EF4-FFF2-40B4-BE49-F238E27FC236}">
+                    <a16:creationId xmlns:a16="http://schemas.microsoft.com/office/drawing/2014/main" id="{CAD86F12-FE21-2B61-89E7-E6A5AFE0475E}"/>
+                  </a:ext>
+                </a:extLst>
+              </p14:cNvPr>
+              <p14:cNvContentPartPr/>
+              <p14:nvPr/>
+            </p14:nvContentPartPr>
+            <p14:xfrm>
+              <a:off x="3511440" y="8701560"/>
+              <a:ext cx="1005840" cy="28800"/>
+            </p14:xfrm>
+          </p:contentPart>
+        </mc:Choice>
+        <mc:Fallback>
+          <p:pic>
+            <p:nvPicPr>
+              <p:cNvPr id="2" name="Input penna 1">
+                <a:extLst>
+                  <a:ext uri="{FF2B5EF4-FFF2-40B4-BE49-F238E27FC236}">
+                    <a16:creationId xmlns:a16="http://schemas.microsoft.com/office/drawing/2014/main" id="{CAD86F12-FE21-2B61-89E7-E6A5AFE0475E}"/>
+                  </a:ext>
+                </a:extLst>
+              </p:cNvPr>
+              <p:cNvPicPr/>
+              <p:nvPr/>
+            </p:nvPicPr>
+            <p:blipFill>
+              <a:blip r:embed="rId5"/>
+              <a:stretch>
+                <a:fillRect/>
+              </a:stretch>
+            </p:blipFill>
+            <p:spPr>
+              <a:xfrm>
+                <a:off x="3495600" y="8638200"/>
+                <a:ext cx="1037160" cy="155520"/>
+              </a:xfrm>
+              <a:prstGeom prst="rect">
+                <a:avLst/>
+              </a:prstGeom>
+            </p:spPr>
+          </p:pic>
+        </mc:Fallback>
+      </mc:AlternateContent>
+      <mc:AlternateContent xmlns:mc="http://schemas.openxmlformats.org/markup-compatibility/2006">
+        <mc:Choice xmlns:p14="http://schemas.microsoft.com/office/powerpoint/2010/main" Requires="p14">
+          <p:contentPart p14:bwMode="auto" r:id="rId6">
+            <p14:nvContentPartPr>
+              <p14:cNvPr id="4" name="Input penna 3">
+                <a:extLst>
+                  <a:ext uri="{FF2B5EF4-FFF2-40B4-BE49-F238E27FC236}">
+                    <a16:creationId xmlns:a16="http://schemas.microsoft.com/office/drawing/2014/main" id="{150CE6CD-1A14-F238-19C2-ABC05C0ECE8B}"/>
+                  </a:ext>
+                </a:extLst>
+              </p14:cNvPr>
+              <p14:cNvContentPartPr/>
+              <p14:nvPr/>
+            </p14:nvContentPartPr>
+            <p14:xfrm>
+              <a:off x="4842360" y="8520480"/>
+              <a:ext cx="4464360" cy="309240"/>
+            </p14:xfrm>
+          </p:contentPart>
+        </mc:Choice>
+        <mc:Fallback>
+          <p:pic>
+            <p:nvPicPr>
+              <p:cNvPr id="4" name="Input penna 3">
+                <a:extLst>
+                  <a:ext uri="{FF2B5EF4-FFF2-40B4-BE49-F238E27FC236}">
+                    <a16:creationId xmlns:a16="http://schemas.microsoft.com/office/drawing/2014/main" id="{150CE6CD-1A14-F238-19C2-ABC05C0ECE8B}"/>
+                  </a:ext>
+                </a:extLst>
+              </p:cNvPr>
+              <p:cNvPicPr/>
+              <p:nvPr/>
+            </p:nvPicPr>
+            <p:blipFill>
+              <a:blip r:embed="rId7"/>
+              <a:stretch>
+                <a:fillRect/>
+              </a:stretch>
+            </p:blipFill>
+            <p:spPr>
+              <a:xfrm>
+                <a:off x="4826520" y="8457120"/>
+                <a:ext cx="4495680" cy="435960"/>
+              </a:xfrm>
+              <a:prstGeom prst="rect">
+                <a:avLst/>
+              </a:prstGeom>
+            </p:spPr>
+          </p:pic>
+        </mc:Fallback>
+      </mc:AlternateContent>
+      <mc:AlternateContent xmlns:mc="http://schemas.openxmlformats.org/markup-compatibility/2006">
+        <mc:Choice xmlns:p14="http://schemas.microsoft.com/office/powerpoint/2010/main" Requires="p14">
+          <p:contentPart p14:bwMode="auto" r:id="rId8">
+            <p14:nvContentPartPr>
+              <p14:cNvPr id="5" name="Input penna 4">
+                <a:extLst>
+                  <a:ext uri="{FF2B5EF4-FFF2-40B4-BE49-F238E27FC236}">
+                    <a16:creationId xmlns:a16="http://schemas.microsoft.com/office/drawing/2014/main" id="{4568501F-B245-C3AE-0414-2A4C66917941}"/>
+                  </a:ext>
+                </a:extLst>
+              </p14:cNvPr>
+              <p14:cNvContentPartPr/>
+              <p14:nvPr/>
+            </p14:nvContentPartPr>
+            <p14:xfrm>
+              <a:off x="9987120" y="8681040"/>
+              <a:ext cx="2417400" cy="203040"/>
+            </p14:xfrm>
+          </p:contentPart>
+        </mc:Choice>
+        <mc:Fallback>
+          <p:pic>
+            <p:nvPicPr>
+              <p:cNvPr id="5" name="Input penna 4">
+                <a:extLst>
+                  <a:ext uri="{FF2B5EF4-FFF2-40B4-BE49-F238E27FC236}">
+                    <a16:creationId xmlns:a16="http://schemas.microsoft.com/office/drawing/2014/main" id="{4568501F-B245-C3AE-0414-2A4C66917941}"/>
+                  </a:ext>
+                </a:extLst>
+              </p:cNvPr>
+              <p:cNvPicPr/>
+              <p:nvPr/>
+            </p:nvPicPr>
+            <p:blipFill>
+              <a:blip r:embed="rId9"/>
+              <a:stretch>
+                <a:fillRect/>
+              </a:stretch>
+            </p:blipFill>
+            <p:spPr>
+              <a:xfrm>
+                <a:off x="9971280" y="8617680"/>
+                <a:ext cx="2448720" cy="329760"/>
+              </a:xfrm>
+              <a:prstGeom prst="rect">
+                <a:avLst/>
+              </a:prstGeom>
+            </p:spPr>
+          </p:pic>
+        </mc:Fallback>
+      </mc:AlternateContent>
+      <mc:AlternateContent xmlns:mc="http://schemas.openxmlformats.org/markup-compatibility/2006">
+        <mc:Choice xmlns:p14="http://schemas.microsoft.com/office/powerpoint/2010/main" Requires="p14">
+          <p:contentPart p14:bwMode="auto" r:id="rId10">
+            <p14:nvContentPartPr>
+              <p14:cNvPr id="6" name="Input penna 5">
+                <a:extLst>
+                  <a:ext uri="{FF2B5EF4-FFF2-40B4-BE49-F238E27FC236}">
+                    <a16:creationId xmlns:a16="http://schemas.microsoft.com/office/drawing/2014/main" id="{32A0D1E8-84A1-1BA9-0462-A6BF45DA4A01}"/>
+                  </a:ext>
+                </a:extLst>
+              </p14:cNvPr>
+              <p14:cNvContentPartPr/>
+              <p14:nvPr/>
+            </p14:nvContentPartPr>
+            <p14:xfrm>
+              <a:off x="3420720" y="9743400"/>
+              <a:ext cx="1257840" cy="28800"/>
+            </p14:xfrm>
+          </p:contentPart>
+        </mc:Choice>
+        <mc:Fallback>
+          <p:pic>
+            <p:nvPicPr>
+              <p:cNvPr id="6" name="Input penna 5">
+                <a:extLst>
+                  <a:ext uri="{FF2B5EF4-FFF2-40B4-BE49-F238E27FC236}">
+                    <a16:creationId xmlns:a16="http://schemas.microsoft.com/office/drawing/2014/main" id="{32A0D1E8-84A1-1BA9-0462-A6BF45DA4A01}"/>
+                  </a:ext>
+                </a:extLst>
+              </p:cNvPr>
+              <p:cNvPicPr/>
+              <p:nvPr/>
+            </p:nvPicPr>
+            <p:blipFill>
+              <a:blip r:embed="rId11"/>
+              <a:stretch>
+                <a:fillRect/>
+              </a:stretch>
+            </p:blipFill>
+            <p:spPr>
+              <a:xfrm>
+                <a:off x="3404880" y="9680040"/>
+                <a:ext cx="1289160" cy="155520"/>
+              </a:xfrm>
+              <a:prstGeom prst="rect">
+                <a:avLst/>
+              </a:prstGeom>
+            </p:spPr>
+          </p:pic>
+        </mc:Fallback>
+      </mc:AlternateContent>
+      <mc:AlternateContent xmlns:mc="http://schemas.openxmlformats.org/markup-compatibility/2006">
+        <mc:Choice xmlns:p14="http://schemas.microsoft.com/office/powerpoint/2010/main" Requires="p14">
+          <p:contentPart p14:bwMode="auto" r:id="rId12">
+            <p14:nvContentPartPr>
+              <p14:cNvPr id="7" name="Input penna 6">
+                <a:extLst>
+                  <a:ext uri="{FF2B5EF4-FFF2-40B4-BE49-F238E27FC236}">
+                    <a16:creationId xmlns:a16="http://schemas.microsoft.com/office/drawing/2014/main" id="{219AF59F-A289-C7A8-02CB-F36F28678918}"/>
+                  </a:ext>
+                </a:extLst>
+              </p14:cNvPr>
+              <p14:cNvContentPartPr/>
+              <p14:nvPr/>
+            </p14:nvContentPartPr>
+            <p14:xfrm>
+              <a:off x="5603760" y="9673200"/>
+              <a:ext cx="4437720" cy="113760"/>
+            </p14:xfrm>
+          </p:contentPart>
+        </mc:Choice>
+        <mc:Fallback>
+          <p:pic>
+            <p:nvPicPr>
+              <p:cNvPr id="7" name="Input penna 6">
+                <a:extLst>
+                  <a:ext uri="{FF2B5EF4-FFF2-40B4-BE49-F238E27FC236}">
+                    <a16:creationId xmlns:a16="http://schemas.microsoft.com/office/drawing/2014/main" id="{219AF59F-A289-C7A8-02CB-F36F28678918}"/>
+                  </a:ext>
+                </a:extLst>
+              </p:cNvPr>
+              <p:cNvPicPr/>
+              <p:nvPr/>
+            </p:nvPicPr>
+            <p:blipFill>
+              <a:blip r:embed="rId13"/>
+              <a:stretch>
+                <a:fillRect/>
+              </a:stretch>
+            </p:blipFill>
+            <p:spPr>
+              <a:xfrm>
+                <a:off x="5587920" y="9609840"/>
+                <a:ext cx="4469040" cy="240480"/>
+              </a:xfrm>
+              <a:prstGeom prst="rect">
+                <a:avLst/>
+              </a:prstGeom>
+            </p:spPr>
+          </p:pic>
+        </mc:Fallback>
+      </mc:AlternateContent>
+      <mc:AlternateContent xmlns:mc="http://schemas.openxmlformats.org/markup-compatibility/2006">
+        <mc:Choice xmlns:p14="http://schemas.microsoft.com/office/powerpoint/2010/main" Requires="p14">
+          <p:contentPart p14:bwMode="auto" r:id="rId14">
+            <p14:nvContentPartPr>
+              <p14:cNvPr id="8" name="Input penna 7">
+                <a:extLst>
+                  <a:ext uri="{FF2B5EF4-FFF2-40B4-BE49-F238E27FC236}">
+                    <a16:creationId xmlns:a16="http://schemas.microsoft.com/office/drawing/2014/main" id="{4A58E1A0-F7CE-E1CC-EAFB-5E5C0C09279E}"/>
+                  </a:ext>
+                </a:extLst>
+              </p14:cNvPr>
+              <p14:cNvContentPartPr/>
+              <p14:nvPr/>
+            </p14:nvContentPartPr>
+            <p14:xfrm>
+              <a:off x="3533400" y="10359360"/>
+              <a:ext cx="3115440" cy="293040"/>
+            </p14:xfrm>
+          </p:contentPart>
+        </mc:Choice>
+        <mc:Fallback>
+          <p:pic>
+            <p:nvPicPr>
+              <p:cNvPr id="8" name="Input penna 7">
+                <a:extLst>
+                  <a:ext uri="{FF2B5EF4-FFF2-40B4-BE49-F238E27FC236}">
+                    <a16:creationId xmlns:a16="http://schemas.microsoft.com/office/drawing/2014/main" id="{4A58E1A0-F7CE-E1CC-EAFB-5E5C0C09279E}"/>
+                  </a:ext>
+                </a:extLst>
+              </p:cNvPr>
+              <p:cNvPicPr/>
+              <p:nvPr/>
+            </p:nvPicPr>
+            <p:blipFill>
+              <a:blip r:embed="rId15"/>
+              <a:stretch>
+                <a:fillRect/>
+              </a:stretch>
+            </p:blipFill>
+            <p:spPr>
+              <a:xfrm>
+                <a:off x="3517560" y="10296000"/>
+                <a:ext cx="3146760" cy="419760"/>
+              </a:xfrm>
+              <a:prstGeom prst="rect">
+                <a:avLst/>
+              </a:prstGeom>
+            </p:spPr>
+          </p:pic>
+        </mc:Fallback>
+      </mc:AlternateContent>
+      <mc:AlternateContent xmlns:mc="http://schemas.openxmlformats.org/markup-compatibility/2006">
+        <mc:Choice xmlns:p14="http://schemas.microsoft.com/office/powerpoint/2010/main" Requires="p14">
+          <p:contentPart p14:bwMode="auto" r:id="rId16">
+            <p14:nvContentPartPr>
+              <p14:cNvPr id="9" name="Input penna 8">
+                <a:extLst>
+                  <a:ext uri="{FF2B5EF4-FFF2-40B4-BE49-F238E27FC236}">
+                    <a16:creationId xmlns:a16="http://schemas.microsoft.com/office/drawing/2014/main" id="{E7BEC71A-4158-C181-A64E-763AE6502C0F}"/>
+                  </a:ext>
+                </a:extLst>
+              </p14:cNvPr>
+              <p14:cNvContentPartPr/>
+              <p14:nvPr/>
+            </p14:nvContentPartPr>
+            <p14:xfrm>
+              <a:off x="7501320" y="10449360"/>
+              <a:ext cx="2856600" cy="170640"/>
+            </p14:xfrm>
+          </p:contentPart>
+        </mc:Choice>
+        <mc:Fallback>
+          <p:pic>
+            <p:nvPicPr>
+              <p:cNvPr id="9" name="Input penna 8">
+                <a:extLst>
+                  <a:ext uri="{FF2B5EF4-FFF2-40B4-BE49-F238E27FC236}">
+                    <a16:creationId xmlns:a16="http://schemas.microsoft.com/office/drawing/2014/main" id="{E7BEC71A-4158-C181-A64E-763AE6502C0F}"/>
+                  </a:ext>
+                </a:extLst>
+              </p:cNvPr>
+              <p:cNvPicPr/>
+              <p:nvPr/>
+            </p:nvPicPr>
+            <p:blipFill>
+              <a:blip r:embed="rId17"/>
+              <a:stretch>
+                <a:fillRect/>
+              </a:stretch>
+            </p:blipFill>
+            <p:spPr>
+              <a:xfrm>
+                <a:off x="7485480" y="10386000"/>
+                <a:ext cx="2887920" cy="297360"/>
+              </a:xfrm>
+              <a:prstGeom prst="rect">
+                <a:avLst/>
+              </a:prstGeom>
+            </p:spPr>
+          </p:pic>
+        </mc:Fallback>
+      </mc:AlternateContent>
+      <mc:AlternateContent xmlns:mc="http://schemas.openxmlformats.org/markup-compatibility/2006">
+        <mc:Choice xmlns:p14="http://schemas.microsoft.com/office/powerpoint/2010/main" Requires="p14">
+          <p:contentPart p14:bwMode="auto" r:id="rId18">
+            <p14:nvContentPartPr>
+              <p14:cNvPr id="10" name="Input penna 9">
+                <a:extLst>
+                  <a:ext uri="{FF2B5EF4-FFF2-40B4-BE49-F238E27FC236}">
+                    <a16:creationId xmlns:a16="http://schemas.microsoft.com/office/drawing/2014/main" id="{058BA7F5-C8D4-6EE8-963B-309B6E669300}"/>
+                  </a:ext>
+                </a:extLst>
+              </p14:cNvPr>
+              <p14:cNvContentPartPr/>
+              <p14:nvPr/>
+            </p14:nvContentPartPr>
+            <p14:xfrm>
+              <a:off x="6254640" y="11391840"/>
+              <a:ext cx="5180400" cy="151560"/>
+            </p14:xfrm>
+          </p:contentPart>
+        </mc:Choice>
+        <mc:Fallback>
+          <p:pic>
+            <p:nvPicPr>
+              <p:cNvPr id="10" name="Input penna 9">
+                <a:extLst>
+                  <a:ext uri="{FF2B5EF4-FFF2-40B4-BE49-F238E27FC236}">
+                    <a16:creationId xmlns:a16="http://schemas.microsoft.com/office/drawing/2014/main" id="{058BA7F5-C8D4-6EE8-963B-309B6E669300}"/>
+                  </a:ext>
+                </a:extLst>
+              </p:cNvPr>
+              <p:cNvPicPr/>
+              <p:nvPr/>
+            </p:nvPicPr>
+            <p:blipFill>
+              <a:blip r:embed="rId19"/>
+              <a:stretch>
+                <a:fillRect/>
+              </a:stretch>
+            </p:blipFill>
+            <p:spPr>
+              <a:xfrm>
+                <a:off x="6238800" y="11328480"/>
+                <a:ext cx="5211720" cy="278280"/>
+              </a:xfrm>
+              <a:prstGeom prst="rect">
+                <a:avLst/>
+              </a:prstGeom>
+            </p:spPr>
+          </p:pic>
+        </mc:Fallback>
+      </mc:AlternateContent>
+      <mc:AlternateContent xmlns:mc="http://schemas.openxmlformats.org/markup-compatibility/2006">
+        <mc:Choice xmlns:p14="http://schemas.microsoft.com/office/powerpoint/2010/main" Requires="p14">
+          <p:contentPart p14:bwMode="auto" r:id="rId20">
+            <p14:nvContentPartPr>
+              <p14:cNvPr id="11" name="Input penna 10">
+                <a:extLst>
+                  <a:ext uri="{FF2B5EF4-FFF2-40B4-BE49-F238E27FC236}">
+                    <a16:creationId xmlns:a16="http://schemas.microsoft.com/office/drawing/2014/main" id="{964B3ED3-8802-EE6A-E650-29877141B5AA}"/>
+                  </a:ext>
+                </a:extLst>
+              </p14:cNvPr>
+              <p14:cNvContentPartPr/>
+              <p14:nvPr/>
+            </p14:nvContentPartPr>
+            <p14:xfrm>
+              <a:off x="2335320" y="6402960"/>
+              <a:ext cx="4539960" cy="254160"/>
+            </p14:xfrm>
+          </p:contentPart>
+        </mc:Choice>
+        <mc:Fallback>
+          <p:pic>
+            <p:nvPicPr>
+              <p:cNvPr id="11" name="Input penna 10">
+                <a:extLst>
+                  <a:ext uri="{FF2B5EF4-FFF2-40B4-BE49-F238E27FC236}">
+                    <a16:creationId xmlns:a16="http://schemas.microsoft.com/office/drawing/2014/main" id="{964B3ED3-8802-EE6A-E650-29877141B5AA}"/>
+                  </a:ext>
+                </a:extLst>
+              </p:cNvPr>
+              <p:cNvPicPr/>
+              <p:nvPr/>
+            </p:nvPicPr>
+            <p:blipFill>
+              <a:blip r:embed="rId21"/>
+              <a:stretch>
+                <a:fillRect/>
+              </a:stretch>
+            </p:blipFill>
+            <p:spPr>
+              <a:xfrm>
+                <a:off x="2319480" y="6339600"/>
+                <a:ext cx="4571280" cy="380880"/>
+              </a:xfrm>
+              <a:prstGeom prst="rect">
+                <a:avLst/>
+              </a:prstGeom>
+            </p:spPr>
+          </p:pic>
+        </mc:Fallback>
+      </mc:AlternateContent>
     </p:spTree>
     <p:extLst>
       <p:ext uri="{BB962C8B-B14F-4D97-AF65-F5344CB8AC3E}">
